--- a/os/lectures/11.S2.week1.1-operator-basics.pptx
+++ b/os/lectures/11.S2.week1.1-operator-basics.pptx
@@ -65,24 +65,25 @@
             <a:noAutofit/>
           </a:bodyPr>
           <a:p>
-            <a:r>
-              <a:rPr lang="en-US" sz="1800" b="0" u="none" strike="noStrike">
-                <a:solidFill>
-                  <a:schemeClr val="dk1"/>
-                </a:solidFill>
-                <a:effectLst/>
-                <a:uFillTx/>
-                <a:latin typeface="Calibri"/>
+            <a:pPr algn="ctr"/>
+            <a:r>
+              <a:rPr lang="en-US" sz="4400" b="0" u="none" strike="noStrike">
+                <a:solidFill>
+                  <a:srgbClr val="000000"/>
+                </a:solidFill>
+                <a:effectLst/>
+                <a:uFillTx/>
+                <a:latin typeface="Arial"/>
               </a:rPr>
               <a:t>Click to move the slide</a:t>
             </a:r>
-            <a:endParaRPr lang="en-US" sz="1800" b="0" u="none" strike="noStrike">
-              <a:solidFill>
-                <a:schemeClr val="dk1"/>
-              </a:solidFill>
-              <a:effectLst/>
-              <a:uFillTx/>
-              <a:latin typeface="Calibri"/>
+            <a:endParaRPr lang="en-US" sz="4400" b="0" u="none" strike="noStrike">
+              <a:solidFill>
+                <a:srgbClr val="000000"/>
+              </a:solidFill>
+              <a:effectLst/>
+              <a:uFillTx/>
+              <a:latin typeface="Arial"/>
             </a:endParaRPr>
           </a:p>
         </p:txBody>
@@ -180,7 +181,7 @@
                 <a:uFillTx/>
                 <a:latin typeface="Times New Roman"/>
               </a:rPr>
-              <a:t>&lt;header&gt;</a:t>
+              <a:t> </a:t>
             </a:r>
             <a:endParaRPr lang="en-US" sz="1400" b="0" u="none" strike="noStrike">
               <a:solidFill>
@@ -246,7 +247,7 @@
                 <a:uFillTx/>
                 <a:latin typeface="Times New Roman"/>
               </a:rPr>
-              <a:t>&lt;date/time&gt;</a:t>
+              <a:t> </a:t>
             </a:r>
             <a:endParaRPr lang="en-US" sz="1400" b="0" u="none" strike="noStrike">
               <a:solidFill>
@@ -312,7 +313,7 @@
                 <a:uFillTx/>
                 <a:latin typeface="Times New Roman"/>
               </a:rPr>
-              <a:t>&lt;footer&gt;</a:t>
+              <a:t> </a:t>
             </a:r>
             <a:endParaRPr lang="en-US" sz="1400" b="0" u="none" strike="noStrike">
               <a:solidFill>
@@ -369,7 +370,7 @@
             <a:pPr indent="0" algn="r">
               <a:buNone/>
             </a:pPr>
-            <a:fld id="{C4960872-9002-4984-B0ED-D34D12ACDCC0}" type="slidenum">
+            <a:fld id="{056DAAC7-7C98-4100-8445-140E8663C6A0}" type="slidenum">
               <a:rPr lang="en-US" sz="1400" b="0" u="none" strike="noStrike">
                 <a:solidFill>
                   <a:srgbClr val="000000"/>
@@ -378,7 +379,7 @@
                 <a:uFillTx/>
                 <a:latin typeface="Times New Roman"/>
               </a:rPr>
-              <a:t>&lt;number&gt;</a:t>
+              <a:t>1</a:t>
             </a:fld>
             <a:endParaRPr lang="en-US" sz="1400" b="0" u="none" strike="noStrike">
               <a:solidFill>
@@ -427,7 +428,7 @@
         <p:spPr>
           <a:xfrm>
             <a:off x="685800" y="1143000"/>
-            <a:ext cx="5486040" cy="3085920"/>
+            <a:ext cx="5485680" cy="3085560"/>
           </a:xfrm>
           <a:prstGeom prst="rect">
             <a:avLst/>
@@ -450,7 +451,7 @@
         <p:spPr>
           <a:xfrm>
             <a:off x="685800" y="4400640"/>
-            <a:ext cx="5486040" cy="3600000"/>
+            <a:ext cx="5485680" cy="3599640"/>
           </a:xfrm>
           <a:prstGeom prst="rect">
             <a:avLst/>
@@ -492,7 +493,7 @@
         <p:spPr>
           <a:xfrm>
             <a:off x="3884760" y="8685360"/>
-            <a:ext cx="2971440" cy="458280"/>
+            <a:ext cx="2971080" cy="457920"/>
           </a:xfrm>
           <a:prstGeom prst="rect">
             <a:avLst/>
@@ -512,6 +513,9 @@
                 <a:spcPct val="100000"/>
               </a:lnSpc>
               <a:buNone/>
+              <a:tabLst>
+                <a:tab algn="l" pos="0"/>
+              </a:tabLst>
               <a:defRPr lang="en-US" sz="1200" b="0" u="none" strike="noStrike">
                 <a:solidFill>
                   <a:schemeClr val="dk1"/>
@@ -529,8 +533,11 @@
                 <a:spcPct val="100000"/>
               </a:lnSpc>
               <a:buNone/>
-            </a:pPr>
-            <a:fld id="{F390BAF5-79E7-46DB-A389-8AEF7271FB4A}" type="slidenum">
+              <a:tabLst>
+                <a:tab algn="l" pos="0"/>
+              </a:tabLst>
+            </a:pPr>
+            <a:fld id="{F47400D8-B881-4FF9-A81C-C6D2AD6F602A}" type="slidenum">
               <a:rPr lang="en-US" sz="1200" b="0" u="none" strike="noStrike">
                 <a:solidFill>
                   <a:schemeClr val="dk1"/>
@@ -540,7 +547,7 @@
                 <a:latin typeface="+mn-lt"/>
                 <a:ea typeface="+mn-ea"/>
               </a:rPr>
-              <a:t>&lt;number&gt;</a:t>
+              <a:t>1</a:t>
             </a:fld>
             <a:endParaRPr lang="en-US" sz="1200" b="0" u="none" strike="noStrike">
               <a:solidFill>
@@ -588,7 +595,7 @@
         <p:spPr>
           <a:xfrm>
             <a:off x="685800" y="1143000"/>
-            <a:ext cx="5486040" cy="3085920"/>
+            <a:ext cx="5485680" cy="3085560"/>
           </a:xfrm>
           <a:prstGeom prst="rect">
             <a:avLst/>
@@ -611,7 +618,7 @@
         <p:spPr>
           <a:xfrm>
             <a:off x="685800" y="4400640"/>
-            <a:ext cx="5486040" cy="3600000"/>
+            <a:ext cx="5485680" cy="3599640"/>
           </a:xfrm>
           <a:prstGeom prst="rect">
             <a:avLst/>
@@ -653,7 +660,7 @@
         <p:spPr>
           <a:xfrm>
             <a:off x="3884760" y="8685360"/>
-            <a:ext cx="2971440" cy="458280"/>
+            <a:ext cx="2971080" cy="457920"/>
           </a:xfrm>
           <a:prstGeom prst="rect">
             <a:avLst/>
@@ -673,6 +680,9 @@
                 <a:spcPct val="100000"/>
               </a:lnSpc>
               <a:buNone/>
+              <a:tabLst>
+                <a:tab algn="l" pos="0"/>
+              </a:tabLst>
               <a:defRPr lang="en-US" sz="1200" b="0" u="none" strike="noStrike">
                 <a:solidFill>
                   <a:schemeClr val="dk1"/>
@@ -690,8 +700,11 @@
                 <a:spcPct val="100000"/>
               </a:lnSpc>
               <a:buNone/>
-            </a:pPr>
-            <a:fld id="{391C96BB-63F2-4D45-AC07-A3435AD19A8F}" type="slidenum">
+              <a:tabLst>
+                <a:tab algn="l" pos="0"/>
+              </a:tabLst>
+            </a:pPr>
+            <a:fld id="{349C50DA-9A2D-43FE-A667-FE02ECA25232}" type="slidenum">
               <a:rPr lang="en-US" sz="1200" b="0" u="none" strike="noStrike">
                 <a:solidFill>
                   <a:schemeClr val="dk1"/>
@@ -701,7 +714,7 @@
                 <a:latin typeface="+mn-lt"/>
                 <a:ea typeface="+mn-ea"/>
               </a:rPr>
-              <a:t>&lt;number&gt;</a:t>
+              <a:t>1</a:t>
             </a:fld>
             <a:endParaRPr lang="en-US" sz="1200" b="0" u="none" strike="noStrike">
               <a:solidFill>
@@ -749,7 +762,7 @@
         <p:spPr>
           <a:xfrm>
             <a:off x="685800" y="1143000"/>
-            <a:ext cx="5486040" cy="3085920"/>
+            <a:ext cx="5485680" cy="3085560"/>
           </a:xfrm>
           <a:prstGeom prst="rect">
             <a:avLst/>
@@ -772,7 +785,7 @@
         <p:spPr>
           <a:xfrm>
             <a:off x="685800" y="4400640"/>
-            <a:ext cx="5486040" cy="3600000"/>
+            <a:ext cx="5485680" cy="3599640"/>
           </a:xfrm>
           <a:prstGeom prst="rect">
             <a:avLst/>
@@ -814,7 +827,7 @@
         <p:spPr>
           <a:xfrm>
             <a:off x="3884760" y="8685360"/>
-            <a:ext cx="2971440" cy="458280"/>
+            <a:ext cx="2971080" cy="457920"/>
           </a:xfrm>
           <a:prstGeom prst="rect">
             <a:avLst/>
@@ -834,6 +847,9 @@
                 <a:spcPct val="100000"/>
               </a:lnSpc>
               <a:buNone/>
+              <a:tabLst>
+                <a:tab algn="l" pos="0"/>
+              </a:tabLst>
               <a:defRPr lang="en-US" sz="1200" b="0" u="none" strike="noStrike">
                 <a:solidFill>
                   <a:schemeClr val="dk1"/>
@@ -851,8 +867,11 @@
                 <a:spcPct val="100000"/>
               </a:lnSpc>
               <a:buNone/>
-            </a:pPr>
-            <a:fld id="{AFDE5937-6412-48B4-9A53-091FAB0D6BF8}" type="slidenum">
+              <a:tabLst>
+                <a:tab algn="l" pos="0"/>
+              </a:tabLst>
+            </a:pPr>
+            <a:fld id="{06DB782E-5BC1-433D-B541-042E1B657760}" type="slidenum">
               <a:rPr lang="en-US" sz="1200" b="0" u="none" strike="noStrike">
                 <a:solidFill>
                   <a:schemeClr val="dk1"/>
@@ -910,7 +929,7 @@
         <p:spPr>
           <a:xfrm>
             <a:off x="685800" y="1143000"/>
-            <a:ext cx="5486040" cy="3085920"/>
+            <a:ext cx="5485680" cy="3085560"/>
           </a:xfrm>
           <a:prstGeom prst="rect">
             <a:avLst/>
@@ -933,7 +952,7 @@
         <p:spPr>
           <a:xfrm>
             <a:off x="685800" y="4400640"/>
-            <a:ext cx="5486040" cy="3600000"/>
+            <a:ext cx="5485680" cy="3599640"/>
           </a:xfrm>
           <a:prstGeom prst="rect">
             <a:avLst/>
@@ -975,7 +994,7 @@
         <p:spPr>
           <a:xfrm>
             <a:off x="3884760" y="8685360"/>
-            <a:ext cx="2971440" cy="458280"/>
+            <a:ext cx="2971080" cy="457920"/>
           </a:xfrm>
           <a:prstGeom prst="rect">
             <a:avLst/>
@@ -995,6 +1014,9 @@
                 <a:spcPct val="100000"/>
               </a:lnSpc>
               <a:buNone/>
+              <a:tabLst>
+                <a:tab algn="l" pos="0"/>
+              </a:tabLst>
               <a:defRPr lang="en-US" sz="1200" b="0" u="none" strike="noStrike">
                 <a:solidFill>
                   <a:schemeClr val="dk1"/>
@@ -1012,8 +1034,11 @@
                 <a:spcPct val="100000"/>
               </a:lnSpc>
               <a:buNone/>
-            </a:pPr>
-            <a:fld id="{E45DDC6A-5097-4D87-A617-E2229C313B5B}" type="slidenum">
+              <a:tabLst>
+                <a:tab algn="l" pos="0"/>
+              </a:tabLst>
+            </a:pPr>
+            <a:fld id="{62272CD1-A71B-4645-8A48-8FFFD2FC7AD6}" type="slidenum">
               <a:rPr lang="en-US" sz="1200" b="0" u="none" strike="noStrike">
                 <a:solidFill>
                   <a:schemeClr val="dk1"/>
@@ -1071,7 +1096,7 @@
         <p:spPr>
           <a:xfrm>
             <a:off x="685800" y="1143000"/>
-            <a:ext cx="5486040" cy="3085920"/>
+            <a:ext cx="5485680" cy="3085560"/>
           </a:xfrm>
           <a:prstGeom prst="rect">
             <a:avLst/>
@@ -1094,7 +1119,7 @@
         <p:spPr>
           <a:xfrm>
             <a:off x="685800" y="4400640"/>
-            <a:ext cx="5486040" cy="3600000"/>
+            <a:ext cx="5485680" cy="3599640"/>
           </a:xfrm>
           <a:prstGeom prst="rect">
             <a:avLst/>
@@ -1136,7 +1161,7 @@
         <p:spPr>
           <a:xfrm>
             <a:off x="3884760" y="8685360"/>
-            <a:ext cx="2971440" cy="458280"/>
+            <a:ext cx="2971080" cy="457920"/>
           </a:xfrm>
           <a:prstGeom prst="rect">
             <a:avLst/>
@@ -1156,6 +1181,9 @@
                 <a:spcPct val="100000"/>
               </a:lnSpc>
               <a:buNone/>
+              <a:tabLst>
+                <a:tab algn="l" pos="0"/>
+              </a:tabLst>
               <a:defRPr lang="en-US" sz="1200" b="0" u="none" strike="noStrike">
                 <a:solidFill>
                   <a:schemeClr val="dk1"/>
@@ -1173,8 +1201,11 @@
                 <a:spcPct val="100000"/>
               </a:lnSpc>
               <a:buNone/>
-            </a:pPr>
-            <a:fld id="{E6F4CEA7-D23D-45EE-B6CD-38D540B88BC5}" type="slidenum">
+              <a:tabLst>
+                <a:tab algn="l" pos="0"/>
+              </a:tabLst>
+            </a:pPr>
+            <a:fld id="{D0CB7E9B-B628-4A81-9209-EC210D6CC3D0}" type="slidenum">
               <a:rPr lang="en-US" sz="1200" b="0" u="none" strike="noStrike">
                 <a:solidFill>
                   <a:schemeClr val="dk1"/>
@@ -1232,7 +1263,7 @@
         <p:spPr>
           <a:xfrm>
             <a:off x="685800" y="1143000"/>
-            <a:ext cx="5486040" cy="3085920"/>
+            <a:ext cx="5485680" cy="3085560"/>
           </a:xfrm>
           <a:prstGeom prst="rect">
             <a:avLst/>
@@ -1255,7 +1286,7 @@
         <p:spPr>
           <a:xfrm>
             <a:off x="685800" y="4400640"/>
-            <a:ext cx="5486040" cy="3600000"/>
+            <a:ext cx="5485680" cy="3599640"/>
           </a:xfrm>
           <a:prstGeom prst="rect">
             <a:avLst/>
@@ -1297,7 +1328,7 @@
         <p:spPr>
           <a:xfrm>
             <a:off x="3884760" y="8685360"/>
-            <a:ext cx="2971440" cy="458280"/>
+            <a:ext cx="2971080" cy="457920"/>
           </a:xfrm>
           <a:prstGeom prst="rect">
             <a:avLst/>
@@ -1317,6 +1348,9 @@
                 <a:spcPct val="100000"/>
               </a:lnSpc>
               <a:buNone/>
+              <a:tabLst>
+                <a:tab algn="l" pos="0"/>
+              </a:tabLst>
               <a:defRPr lang="en-US" sz="1200" b="0" u="none" strike="noStrike">
                 <a:solidFill>
                   <a:schemeClr val="dk1"/>
@@ -1334,8 +1368,11 @@
                 <a:spcPct val="100000"/>
               </a:lnSpc>
               <a:buNone/>
-            </a:pPr>
-            <a:fld id="{565EB3FA-E5FB-40C0-971C-A7B8EA063AB0}" type="slidenum">
+              <a:tabLst>
+                <a:tab algn="l" pos="0"/>
+              </a:tabLst>
+            </a:pPr>
+            <a:fld id="{D7A9BFB9-F973-4D65-8DD2-3934D50ACD5B}" type="slidenum">
               <a:rPr lang="en-US" sz="1200" b="0" u="none" strike="noStrike">
                 <a:solidFill>
                   <a:schemeClr val="dk1"/>
@@ -1437,38 +1474,27 @@
             <a:noAutofit/>
           </a:bodyPr>
           <a:p>
-            <a:pPr indent="0">
+            <a:pPr indent="0" algn="ctr">
               <a:buNone/>
             </a:pPr>
             <a:r>
-              <a:rPr lang="en-US" sz="1800" b="0" u="none" strike="noStrike">
-                <a:solidFill>
-                  <a:schemeClr val="dk1"/>
-                </a:solidFill>
-                <a:effectLst/>
-                <a:uFillTx/>
-                <a:latin typeface="Calibri"/>
-              </a:rPr>
-              <a:t>Click to edit the title text </a:t>
-            </a:r>
-            <a:r>
-              <a:rPr lang="en-US" sz="1800" b="0" u="none" strike="noStrike">
-                <a:solidFill>
-                  <a:schemeClr val="dk1"/>
-                </a:solidFill>
-                <a:effectLst/>
-                <a:uFillTx/>
-                <a:latin typeface="Calibri"/>
-              </a:rPr>
-              <a:t>format</a:t>
-            </a:r>
-            <a:endParaRPr lang="en-US" sz="1800" b="0" u="none" strike="noStrike">
-              <a:solidFill>
-                <a:schemeClr val="dk1"/>
-              </a:solidFill>
-              <a:effectLst/>
-              <a:uFillTx/>
-              <a:latin typeface="Calibri"/>
+              <a:rPr lang="en-US" sz="4400" b="0" u="none" strike="noStrike">
+                <a:solidFill>
+                  <a:srgbClr val="000000"/>
+                </a:solidFill>
+                <a:effectLst/>
+                <a:uFillTx/>
+                <a:latin typeface="Arial"/>
+              </a:rPr>
+              <a:t>Click to edit the title text format</a:t>
+            </a:r>
+            <a:endParaRPr lang="en-US" sz="4400" b="0" u="none" strike="noStrike">
+              <a:solidFill>
+                <a:srgbClr val="000000"/>
+              </a:solidFill>
+              <a:effectLst/>
+              <a:uFillTx/>
+              <a:latin typeface="Arial"/>
             </a:endParaRPr>
           </a:p>
         </p:txBody>
@@ -1515,21 +1541,21 @@
             <a:r>
               <a:rPr lang="en-US" sz="3200" b="0" u="none" strike="noStrike">
                 <a:solidFill>
-                  <a:schemeClr val="dk1"/>
-                </a:solidFill>
-                <a:effectLst/>
-                <a:uFillTx/>
-                <a:latin typeface="Calibri"/>
+                  <a:srgbClr val="000000"/>
+                </a:solidFill>
+                <a:effectLst/>
+                <a:uFillTx/>
+                <a:latin typeface="Arial"/>
               </a:rPr>
               <a:t>Click to edit the outline text format</a:t>
             </a:r>
             <a:endParaRPr lang="en-US" sz="3200" b="0" u="none" strike="noStrike">
               <a:solidFill>
-                <a:schemeClr val="dk1"/>
-              </a:solidFill>
-              <a:effectLst/>
-              <a:uFillTx/>
-              <a:latin typeface="Calibri"/>
+                <a:srgbClr val="000000"/>
+              </a:solidFill>
+              <a:effectLst/>
+              <a:uFillTx/>
+              <a:latin typeface="Arial"/>
             </a:endParaRPr>
           </a:p>
           <a:p>
@@ -1545,23 +1571,23 @@
               <a:buChar char=""/>
             </a:pPr>
             <a:r>
-              <a:rPr lang="en-US" sz="2400" b="0" u="none" strike="noStrike">
-                <a:solidFill>
-                  <a:schemeClr val="dk1"/>
-                </a:solidFill>
-                <a:effectLst/>
-                <a:uFillTx/>
-                <a:latin typeface="Calibri"/>
+              <a:rPr lang="en-US" sz="2800" b="0" u="none" strike="noStrike">
+                <a:solidFill>
+                  <a:srgbClr val="000000"/>
+                </a:solidFill>
+                <a:effectLst/>
+                <a:uFillTx/>
+                <a:latin typeface="Arial"/>
               </a:rPr>
               <a:t>Second Outline Level</a:t>
             </a:r>
-            <a:endParaRPr lang="en-US" sz="2400" b="0" u="none" strike="noStrike">
-              <a:solidFill>
-                <a:schemeClr val="dk1"/>
-              </a:solidFill>
-              <a:effectLst/>
-              <a:uFillTx/>
-              <a:latin typeface="Calibri"/>
+            <a:endParaRPr lang="en-US" sz="2800" b="0" u="none" strike="noStrike">
+              <a:solidFill>
+                <a:srgbClr val="000000"/>
+              </a:solidFill>
+              <a:effectLst/>
+              <a:uFillTx/>
+              <a:latin typeface="Arial"/>
             </a:endParaRPr>
           </a:p>
           <a:p>
@@ -1577,23 +1603,23 @@
               <a:buChar char=""/>
             </a:pPr>
             <a:r>
-              <a:rPr lang="en-US" sz="2000" b="0" u="none" strike="noStrike">
-                <a:solidFill>
-                  <a:schemeClr val="dk1"/>
-                </a:solidFill>
-                <a:effectLst/>
-                <a:uFillTx/>
-                <a:latin typeface="Calibri"/>
+              <a:rPr lang="en-US" sz="2400" b="0" u="none" strike="noStrike">
+                <a:solidFill>
+                  <a:srgbClr val="000000"/>
+                </a:solidFill>
+                <a:effectLst/>
+                <a:uFillTx/>
+                <a:latin typeface="Arial"/>
               </a:rPr>
               <a:t>Third Outline Level</a:t>
             </a:r>
-            <a:endParaRPr lang="en-US" sz="2000" b="0" u="none" strike="noStrike">
-              <a:solidFill>
-                <a:schemeClr val="dk1"/>
-              </a:solidFill>
-              <a:effectLst/>
-              <a:uFillTx/>
-              <a:latin typeface="Calibri"/>
+            <a:endParaRPr lang="en-US" sz="2400" b="0" u="none" strike="noStrike">
+              <a:solidFill>
+                <a:srgbClr val="000000"/>
+              </a:solidFill>
+              <a:effectLst/>
+              <a:uFillTx/>
+              <a:latin typeface="Arial"/>
             </a:endParaRPr>
           </a:p>
           <a:p>
@@ -1611,21 +1637,21 @@
             <a:r>
               <a:rPr lang="en-US" sz="2000" b="0" u="none" strike="noStrike">
                 <a:solidFill>
-                  <a:schemeClr val="dk1"/>
-                </a:solidFill>
-                <a:effectLst/>
-                <a:uFillTx/>
-                <a:latin typeface="Calibri"/>
+                  <a:srgbClr val="000000"/>
+                </a:solidFill>
+                <a:effectLst/>
+                <a:uFillTx/>
+                <a:latin typeface="Arial"/>
               </a:rPr>
               <a:t>Fourth Outline Level</a:t>
             </a:r>
             <a:endParaRPr lang="en-US" sz="2000" b="0" u="none" strike="noStrike">
               <a:solidFill>
-                <a:schemeClr val="dk1"/>
-              </a:solidFill>
-              <a:effectLst/>
-              <a:uFillTx/>
-              <a:latin typeface="Calibri"/>
+                <a:srgbClr val="000000"/>
+              </a:solidFill>
+              <a:effectLst/>
+              <a:uFillTx/>
+              <a:latin typeface="Arial"/>
             </a:endParaRPr>
           </a:p>
           <a:p>
@@ -1643,21 +1669,21 @@
             <a:r>
               <a:rPr lang="en-US" sz="2000" b="0" u="none" strike="noStrike">
                 <a:solidFill>
-                  <a:schemeClr val="dk1"/>
-                </a:solidFill>
-                <a:effectLst/>
-                <a:uFillTx/>
-                <a:latin typeface="Calibri"/>
+                  <a:srgbClr val="000000"/>
+                </a:solidFill>
+                <a:effectLst/>
+                <a:uFillTx/>
+                <a:latin typeface="Arial"/>
               </a:rPr>
               <a:t>Fifth Outline Level</a:t>
             </a:r>
             <a:endParaRPr lang="en-US" sz="2000" b="0" u="none" strike="noStrike">
               <a:solidFill>
-                <a:schemeClr val="dk1"/>
-              </a:solidFill>
-              <a:effectLst/>
-              <a:uFillTx/>
-              <a:latin typeface="Calibri"/>
+                <a:srgbClr val="000000"/>
+              </a:solidFill>
+              <a:effectLst/>
+              <a:uFillTx/>
+              <a:latin typeface="Arial"/>
             </a:endParaRPr>
           </a:p>
           <a:p>
@@ -1675,21 +1701,21 @@
             <a:r>
               <a:rPr lang="en-US" sz="2000" b="0" u="none" strike="noStrike">
                 <a:solidFill>
-                  <a:schemeClr val="dk1"/>
-                </a:solidFill>
-                <a:effectLst/>
-                <a:uFillTx/>
-                <a:latin typeface="Calibri"/>
+                  <a:srgbClr val="000000"/>
+                </a:solidFill>
+                <a:effectLst/>
+                <a:uFillTx/>
+                <a:latin typeface="Arial"/>
               </a:rPr>
               <a:t>Sixth Outline Level</a:t>
             </a:r>
             <a:endParaRPr lang="en-US" sz="2000" b="0" u="none" strike="noStrike">
               <a:solidFill>
-                <a:schemeClr val="dk1"/>
-              </a:solidFill>
-              <a:effectLst/>
-              <a:uFillTx/>
-              <a:latin typeface="Calibri"/>
+                <a:srgbClr val="000000"/>
+              </a:solidFill>
+              <a:effectLst/>
+              <a:uFillTx/>
+              <a:latin typeface="Arial"/>
             </a:endParaRPr>
           </a:p>
           <a:p>
@@ -1707,21 +1733,21 @@
             <a:r>
               <a:rPr lang="en-US" sz="2000" b="0" u="none" strike="noStrike">
                 <a:solidFill>
-                  <a:schemeClr val="dk1"/>
-                </a:solidFill>
-                <a:effectLst/>
-                <a:uFillTx/>
-                <a:latin typeface="Calibri"/>
+                  <a:srgbClr val="000000"/>
+                </a:solidFill>
+                <a:effectLst/>
+                <a:uFillTx/>
+                <a:latin typeface="Arial"/>
               </a:rPr>
               <a:t>Seventh Outline Level</a:t>
             </a:r>
             <a:endParaRPr lang="en-US" sz="2000" b="0" u="none" strike="noStrike">
               <a:solidFill>
-                <a:schemeClr val="dk1"/>
-              </a:solidFill>
-              <a:effectLst/>
-              <a:uFillTx/>
-              <a:latin typeface="Calibri"/>
+                <a:srgbClr val="000000"/>
+              </a:solidFill>
+              <a:effectLst/>
+              <a:uFillTx/>
+              <a:latin typeface="Arial"/>
             </a:endParaRPr>
           </a:p>
         </p:txBody>
@@ -1767,8 +1793,8 @@
         </p:nvSpPr>
         <p:spPr>
           <a:xfrm>
-            <a:off x="1280160" y="1417320"/>
-            <a:ext cx="9600840" cy="3748680"/>
+            <a:off x="1143720" y="1417320"/>
+            <a:ext cx="9600480" cy="3748320"/>
           </a:xfrm>
           <a:prstGeom prst="roundRect">
             <a:avLst>
@@ -1796,6 +1822,11 @@
             <a:noAutofit/>
           </a:bodyPr>
           <a:p>
+            <a:pPr>
+              <a:lnSpc>
+                <a:spcPct val="100000"/>
+              </a:lnSpc>
+            </a:pPr>
             <a:endParaRPr lang="en-US" sz="1800" b="0" u="none" strike="noStrike">
               <a:solidFill>
                 <a:srgbClr val="ffffff"/>
@@ -1816,7 +1847,7 @@
         <p:spPr>
           <a:xfrm>
             <a:off x="1280160" y="1417320"/>
-            <a:ext cx="9600840" cy="383760"/>
+            <a:ext cx="9600480" cy="383400"/>
           </a:xfrm>
           <a:prstGeom prst="rect">
             <a:avLst/>
@@ -1839,6 +1870,11 @@
             <a:noAutofit/>
           </a:bodyPr>
           <a:p>
+            <a:pPr>
+              <a:lnSpc>
+                <a:spcPct val="100000"/>
+              </a:lnSpc>
+            </a:pPr>
             <a:endParaRPr lang="en-US" sz="1800" b="0" u="none" strike="noStrike">
               <a:solidFill>
                 <a:srgbClr val="ffffff"/>
@@ -1859,7 +1895,7 @@
         <p:spPr>
           <a:xfrm>
             <a:off x="1508760" y="1549800"/>
-            <a:ext cx="118440" cy="118440"/>
+            <a:ext cx="118080" cy="118080"/>
           </a:xfrm>
           <a:prstGeom prst="ellipse">
             <a:avLst/>
@@ -1882,6 +1918,11 @@
             <a:noAutofit/>
           </a:bodyPr>
           <a:p>
+            <a:pPr>
+              <a:lnSpc>
+                <a:spcPct val="100000"/>
+              </a:lnSpc>
+            </a:pPr>
             <a:endParaRPr lang="en-US" sz="1800" b="0" u="none" strike="noStrike">
               <a:solidFill>
                 <a:srgbClr val="ffffff"/>
@@ -1902,7 +1943,7 @@
         <p:spPr>
           <a:xfrm>
             <a:off x="1710000" y="1549800"/>
-            <a:ext cx="118440" cy="118440"/>
+            <a:ext cx="118080" cy="118080"/>
           </a:xfrm>
           <a:prstGeom prst="ellipse">
             <a:avLst/>
@@ -1925,6 +1966,11 @@
             <a:noAutofit/>
           </a:bodyPr>
           <a:p>
+            <a:pPr>
+              <a:lnSpc>
+                <a:spcPct val="100000"/>
+              </a:lnSpc>
+            </a:pPr>
             <a:endParaRPr lang="en-US" sz="1800" b="0" u="none" strike="noStrike">
               <a:solidFill>
                 <a:srgbClr val="000000"/>
@@ -1945,7 +1991,7 @@
         <p:spPr>
           <a:xfrm>
             <a:off x="1911240" y="1549800"/>
-            <a:ext cx="118440" cy="118440"/>
+            <a:ext cx="118080" cy="118080"/>
           </a:xfrm>
           <a:prstGeom prst="ellipse">
             <a:avLst/>
@@ -1968,6 +2014,11 @@
             <a:noAutofit/>
           </a:bodyPr>
           <a:p>
+            <a:pPr>
+              <a:lnSpc>
+                <a:spcPct val="100000"/>
+              </a:lnSpc>
+            </a:pPr>
             <a:endParaRPr lang="en-US" sz="1800" b="0" u="none" strike="noStrike">
               <a:solidFill>
                 <a:srgbClr val="000000"/>
@@ -1988,7 +2039,7 @@
         <p:spPr>
           <a:xfrm>
             <a:off x="1280160" y="1417320"/>
-            <a:ext cx="9600840" cy="383760"/>
+            <a:ext cx="9600480" cy="383400"/>
           </a:xfrm>
           <a:prstGeom prst="rect">
             <a:avLst/>
@@ -2049,7 +2100,7 @@
         <p:spPr>
           <a:xfrm>
             <a:off x="1737360" y="2194560"/>
-            <a:ext cx="8686440" cy="822600"/>
+            <a:ext cx="8686080" cy="822240"/>
           </a:xfrm>
           <a:prstGeom prst="rect">
             <a:avLst/>
@@ -2110,7 +2161,7 @@
         <p:spPr>
           <a:xfrm>
             <a:off x="1737360" y="2926080"/>
-            <a:ext cx="8686440" cy="456840"/>
+            <a:ext cx="8686080" cy="456480"/>
           </a:xfrm>
           <a:prstGeom prst="rect">
             <a:avLst/>
@@ -2171,7 +2222,7 @@
         <p:spPr>
           <a:xfrm>
             <a:off x="1737360" y="3794760"/>
-            <a:ext cx="1599840" cy="456840"/>
+            <a:ext cx="1599480" cy="456480"/>
           </a:xfrm>
           <a:prstGeom prst="rect">
             <a:avLst/>
@@ -2232,7 +2283,7 @@
         <p:spPr>
           <a:xfrm>
             <a:off x="3474720" y="3794760"/>
-            <a:ext cx="1599840" cy="456840"/>
+            <a:ext cx="1599480" cy="456480"/>
           </a:xfrm>
           <a:prstGeom prst="rect">
             <a:avLst/>
@@ -2271,7 +2322,7 @@
                 <a:latin typeface="Courier New"/>
                 <a:ea typeface="Courier New"/>
               </a:rPr>
-              <a:t>$ grep flag</a:t>
+              <a:t>$ md5 hash</a:t>
             </a:r>
             <a:endParaRPr lang="en-US" sz="1400" b="0" u="none" strike="noStrike">
               <a:solidFill>
@@ -2293,7 +2344,7 @@
         <p:spPr>
           <a:xfrm>
             <a:off x="5212080" y="3794760"/>
-            <a:ext cx="1599840" cy="456840"/>
+            <a:ext cx="1599480" cy="456480"/>
           </a:xfrm>
           <a:prstGeom prst="rect">
             <a:avLst/>
@@ -2354,7 +2405,7 @@
         <p:spPr>
           <a:xfrm>
             <a:off x="6949440" y="3794760"/>
-            <a:ext cx="1599840" cy="456840"/>
+            <a:ext cx="1599480" cy="456480"/>
           </a:xfrm>
           <a:prstGeom prst="rect">
             <a:avLst/>
@@ -2415,7 +2466,7 @@
         <p:spPr>
           <a:xfrm>
             <a:off x="8686800" y="3794760"/>
-            <a:ext cx="1599840" cy="456840"/>
+            <a:ext cx="1599480" cy="456480"/>
           </a:xfrm>
           <a:prstGeom prst="rect">
             <a:avLst/>
@@ -2476,7 +2527,7 @@
         <p:spPr>
           <a:xfrm>
             <a:off x="1737360" y="4389120"/>
-            <a:ext cx="8686440" cy="456840"/>
+            <a:ext cx="8686080" cy="456480"/>
           </a:xfrm>
           <a:prstGeom prst="rect">
             <a:avLst/>
@@ -2537,7 +2588,7 @@
         <p:spPr>
           <a:xfrm>
             <a:off x="10881360" y="6510600"/>
-            <a:ext cx="1096920" cy="273960"/>
+            <a:ext cx="1096560" cy="273600"/>
           </a:xfrm>
           <a:prstGeom prst="rect">
             <a:avLst/>
@@ -2598,7 +2649,7 @@
         <p:spPr>
           <a:xfrm>
             <a:off x="457200" y="6510600"/>
-            <a:ext cx="3657240" cy="273960"/>
+            <a:ext cx="3656880" cy="273600"/>
           </a:xfrm>
           <a:prstGeom prst="rect">
             <a:avLst/>
@@ -2696,7 +2747,7 @@
         <p:spPr>
           <a:xfrm>
             <a:off x="0" y="0"/>
-            <a:ext cx="3931560" cy="6857640"/>
+            <a:ext cx="3931200" cy="6857280"/>
           </a:xfrm>
           <a:prstGeom prst="rect">
             <a:avLst/>
@@ -2719,6 +2770,11 @@
             <a:noAutofit/>
           </a:bodyPr>
           <a:p>
+            <a:pPr>
+              <a:lnSpc>
+                <a:spcPct val="100000"/>
+              </a:lnSpc>
+            </a:pPr>
             <a:endParaRPr lang="en-US" sz="1800" b="0" u="none" strike="noStrike">
               <a:solidFill>
                 <a:srgbClr val="ffffff"/>
@@ -2739,7 +2795,7 @@
         <p:spPr>
           <a:xfrm>
             <a:off x="457200" y="502920"/>
-            <a:ext cx="2742840" cy="1005480"/>
+            <a:ext cx="2742480" cy="1005120"/>
           </a:xfrm>
           <a:prstGeom prst="rect">
             <a:avLst/>
@@ -2800,7 +2856,7 @@
         <p:spPr>
           <a:xfrm>
             <a:off x="457200" y="1600200"/>
-            <a:ext cx="3017160" cy="914040"/>
+            <a:ext cx="3016800" cy="913680"/>
           </a:xfrm>
           <a:prstGeom prst="roundRect">
             <a:avLst>
@@ -2828,6 +2884,11 @@
             <a:noAutofit/>
           </a:bodyPr>
           <a:p>
+            <a:pPr>
+              <a:lnSpc>
+                <a:spcPct val="100000"/>
+              </a:lnSpc>
+            </a:pPr>
             <a:endParaRPr lang="en-US" sz="1800" b="0" u="none" strike="noStrike">
               <a:solidFill>
                 <a:srgbClr val="ffffff"/>
@@ -2848,7 +2909,7 @@
         <p:spPr>
           <a:xfrm>
             <a:off x="640080" y="1737360"/>
-            <a:ext cx="118440" cy="118440"/>
+            <a:ext cx="118080" cy="118080"/>
           </a:xfrm>
           <a:prstGeom prst="ellipse">
             <a:avLst/>
@@ -2871,6 +2932,11 @@
             <a:noAutofit/>
           </a:bodyPr>
           <a:p>
+            <a:pPr>
+              <a:lnSpc>
+                <a:spcPct val="100000"/>
+              </a:lnSpc>
+            </a:pPr>
             <a:endParaRPr lang="en-US" sz="1800" b="0" u="none" strike="noStrike">
               <a:solidFill>
                 <a:srgbClr val="ffffff"/>
@@ -2891,7 +2957,7 @@
         <p:spPr>
           <a:xfrm>
             <a:off x="841320" y="1737360"/>
-            <a:ext cx="118440" cy="118440"/>
+            <a:ext cx="118080" cy="118080"/>
           </a:xfrm>
           <a:prstGeom prst="ellipse">
             <a:avLst/>
@@ -2914,6 +2980,11 @@
             <a:noAutofit/>
           </a:bodyPr>
           <a:p>
+            <a:pPr>
+              <a:lnSpc>
+                <a:spcPct val="100000"/>
+              </a:lnSpc>
+            </a:pPr>
             <a:endParaRPr lang="en-US" sz="1800" b="0" u="none" strike="noStrike">
               <a:solidFill>
                 <a:srgbClr val="000000"/>
@@ -2934,7 +3005,7 @@
         <p:spPr>
           <a:xfrm>
             <a:off x="1042560" y="1737360"/>
-            <a:ext cx="118440" cy="118440"/>
+            <a:ext cx="118080" cy="118080"/>
           </a:xfrm>
           <a:prstGeom prst="ellipse">
             <a:avLst/>
@@ -2957,6 +3028,11 @@
             <a:noAutofit/>
           </a:bodyPr>
           <a:p>
+            <a:pPr>
+              <a:lnSpc>
+                <a:spcPct val="100000"/>
+              </a:lnSpc>
+            </a:pPr>
             <a:endParaRPr lang="en-US" sz="1800" b="0" u="none" strike="noStrike">
               <a:solidFill>
                 <a:srgbClr val="000000"/>
@@ -2977,7 +3053,7 @@
         <p:spPr>
           <a:xfrm>
             <a:off x="594360" y="1965960"/>
-            <a:ext cx="2742840" cy="456840"/>
+            <a:ext cx="2742480" cy="456480"/>
           </a:xfrm>
           <a:prstGeom prst="rect">
             <a:avLst/>
@@ -3038,7 +3114,7 @@
         <p:spPr>
           <a:xfrm>
             <a:off x="457200" y="2743200"/>
-            <a:ext cx="3017160" cy="2377080"/>
+            <a:ext cx="3016800" cy="2376720"/>
           </a:xfrm>
           <a:prstGeom prst="rect">
             <a:avLst/>
@@ -3099,7 +3175,7 @@
         <p:spPr>
           <a:xfrm>
             <a:off x="4480560" y="548640"/>
-            <a:ext cx="7159320" cy="456840"/>
+            <a:ext cx="7158960" cy="456480"/>
           </a:xfrm>
           <a:prstGeom prst="rect">
             <a:avLst/>
@@ -3160,7 +3236,7 @@
         <p:spPr>
           <a:xfrm>
             <a:off x="4480560" y="1188720"/>
-            <a:ext cx="7159320" cy="4114440"/>
+            <a:ext cx="7158960" cy="4114080"/>
           </a:xfrm>
           <a:prstGeom prst="rect">
             <a:avLst/>
@@ -3331,7 +3407,7 @@
         <p:spPr>
           <a:xfrm>
             <a:off x="4480560" y="5577840"/>
-            <a:ext cx="7159320" cy="776880"/>
+            <a:ext cx="7158960" cy="776520"/>
           </a:xfrm>
           <a:prstGeom prst="roundRect">
             <a:avLst>
@@ -3359,6 +3435,11 @@
             <a:noAutofit/>
           </a:bodyPr>
           <a:p>
+            <a:pPr>
+              <a:lnSpc>
+                <a:spcPct val="100000"/>
+              </a:lnSpc>
+            </a:pPr>
             <a:endParaRPr lang="en-US" sz="1800" b="0" u="none" strike="noStrike">
               <a:solidFill>
                 <a:srgbClr val="ffffff"/>
@@ -3379,7 +3460,7 @@
         <p:spPr>
           <a:xfrm>
             <a:off x="4709160" y="5577840"/>
-            <a:ext cx="1462680" cy="776880"/>
+            <a:ext cx="1462320" cy="776520"/>
           </a:xfrm>
           <a:prstGeom prst="rect">
             <a:avLst/>
@@ -3442,7 +3523,7 @@
         <p:spPr>
           <a:xfrm>
             <a:off x="6035040" y="5577840"/>
-            <a:ext cx="5421960" cy="776880"/>
+            <a:ext cx="5421600" cy="776520"/>
           </a:xfrm>
           <a:prstGeom prst="rect">
             <a:avLst/>
@@ -3474,7 +3555,7 @@
             <a:r>
               <a:rPr lang="en-US" sz="1200" b="0" u="sng" strike="noStrike">
                 <a:solidFill>
-                  <a:srgbClr val="00e676"/>
+                  <a:srgbClr val="0563c1"/>
                 </a:solidFill>
                 <a:effectLst/>
                 <a:uFillTx/>
@@ -3504,7 +3585,7 @@
         <p:spPr>
           <a:xfrm>
             <a:off x="10881360" y="6510600"/>
-            <a:ext cx="1096920" cy="273960"/>
+            <a:ext cx="1096560" cy="273600"/>
           </a:xfrm>
           <a:prstGeom prst="rect">
             <a:avLst/>
@@ -3565,7 +3646,7 @@
         <p:spPr>
           <a:xfrm>
             <a:off x="457200" y="6510600"/>
-            <a:ext cx="3657240" cy="273960"/>
+            <a:ext cx="3656880" cy="273600"/>
           </a:xfrm>
           <a:prstGeom prst="rect">
             <a:avLst/>
@@ -3663,7 +3744,7 @@
         <p:spPr>
           <a:xfrm>
             <a:off x="0" y="0"/>
-            <a:ext cx="3931560" cy="6857640"/>
+            <a:ext cx="3931200" cy="6857280"/>
           </a:xfrm>
           <a:prstGeom prst="rect">
             <a:avLst/>
@@ -3686,6 +3767,11 @@
             <a:noAutofit/>
           </a:bodyPr>
           <a:p>
+            <a:pPr>
+              <a:lnSpc>
+                <a:spcPct val="100000"/>
+              </a:lnSpc>
+            </a:pPr>
             <a:endParaRPr lang="en-US" sz="1800" b="0" u="none" strike="noStrike">
               <a:solidFill>
                 <a:srgbClr val="ffffff"/>
@@ -3706,7 +3792,7 @@
         <p:spPr>
           <a:xfrm>
             <a:off x="457200" y="502920"/>
-            <a:ext cx="2742840" cy="1005480"/>
+            <a:ext cx="2742480" cy="1005120"/>
           </a:xfrm>
           <a:prstGeom prst="rect">
             <a:avLst/>
@@ -3767,7 +3853,7 @@
         <p:spPr>
           <a:xfrm>
             <a:off x="457200" y="1600200"/>
-            <a:ext cx="3017160" cy="914040"/>
+            <a:ext cx="3016800" cy="913680"/>
           </a:xfrm>
           <a:prstGeom prst="roundRect">
             <a:avLst>
@@ -3795,6 +3881,11 @@
             <a:noAutofit/>
           </a:bodyPr>
           <a:p>
+            <a:pPr>
+              <a:lnSpc>
+                <a:spcPct val="100000"/>
+              </a:lnSpc>
+            </a:pPr>
             <a:endParaRPr lang="en-US" sz="1800" b="0" u="none" strike="noStrike">
               <a:solidFill>
                 <a:srgbClr val="ffffff"/>
@@ -3815,7 +3906,7 @@
         <p:spPr>
           <a:xfrm>
             <a:off x="640080" y="1737360"/>
-            <a:ext cx="118440" cy="118440"/>
+            <a:ext cx="118080" cy="118080"/>
           </a:xfrm>
           <a:prstGeom prst="ellipse">
             <a:avLst/>
@@ -3838,6 +3929,11 @@
             <a:noAutofit/>
           </a:bodyPr>
           <a:p>
+            <a:pPr>
+              <a:lnSpc>
+                <a:spcPct val="100000"/>
+              </a:lnSpc>
+            </a:pPr>
             <a:endParaRPr lang="en-US" sz="1800" b="0" u="none" strike="noStrike">
               <a:solidFill>
                 <a:srgbClr val="ffffff"/>
@@ -3858,7 +3954,7 @@
         <p:spPr>
           <a:xfrm>
             <a:off x="841320" y="1737360"/>
-            <a:ext cx="118440" cy="118440"/>
+            <a:ext cx="118080" cy="118080"/>
           </a:xfrm>
           <a:prstGeom prst="ellipse">
             <a:avLst/>
@@ -3881,6 +3977,11 @@
             <a:noAutofit/>
           </a:bodyPr>
           <a:p>
+            <a:pPr>
+              <a:lnSpc>
+                <a:spcPct val="100000"/>
+              </a:lnSpc>
+            </a:pPr>
             <a:endParaRPr lang="en-US" sz="1800" b="0" u="none" strike="noStrike">
               <a:solidFill>
                 <a:srgbClr val="000000"/>
@@ -3901,7 +4002,7 @@
         <p:spPr>
           <a:xfrm>
             <a:off x="1042560" y="1737360"/>
-            <a:ext cx="118440" cy="118440"/>
+            <a:ext cx="118080" cy="118080"/>
           </a:xfrm>
           <a:prstGeom prst="ellipse">
             <a:avLst/>
@@ -3924,6 +4025,11 @@
             <a:noAutofit/>
           </a:bodyPr>
           <a:p>
+            <a:pPr>
+              <a:lnSpc>
+                <a:spcPct val="100000"/>
+              </a:lnSpc>
+            </a:pPr>
             <a:endParaRPr lang="en-US" sz="1800" b="0" u="none" strike="noStrike">
               <a:solidFill>
                 <a:srgbClr val="000000"/>
@@ -3944,7 +4050,7 @@
         <p:spPr>
           <a:xfrm>
             <a:off x="594360" y="1965960"/>
-            <a:ext cx="3886200" cy="456840"/>
+            <a:ext cx="3885840" cy="456480"/>
           </a:xfrm>
           <a:prstGeom prst="rect">
             <a:avLst/>
@@ -4026,7 +4132,7 @@
         <p:spPr>
           <a:xfrm>
             <a:off x="457200" y="2743200"/>
-            <a:ext cx="3017160" cy="2377080"/>
+            <a:ext cx="3016800" cy="2376720"/>
           </a:xfrm>
           <a:prstGeom prst="rect">
             <a:avLst/>
@@ -4087,7 +4193,7 @@
         <p:spPr>
           <a:xfrm>
             <a:off x="4480560" y="548640"/>
-            <a:ext cx="7159320" cy="456840"/>
+            <a:ext cx="7158960" cy="456480"/>
           </a:xfrm>
           <a:prstGeom prst="rect">
             <a:avLst/>
@@ -4148,7 +4254,7 @@
         <p:spPr>
           <a:xfrm>
             <a:off x="4480560" y="1188720"/>
-            <a:ext cx="7159320" cy="4114440"/>
+            <a:ext cx="7158960" cy="4114080"/>
           </a:xfrm>
           <a:prstGeom prst="rect">
             <a:avLst/>
@@ -4319,7 +4425,7 @@
         <p:spPr>
           <a:xfrm>
             <a:off x="4480560" y="5577840"/>
-            <a:ext cx="7159320" cy="776880"/>
+            <a:ext cx="7158960" cy="776520"/>
           </a:xfrm>
           <a:prstGeom prst="roundRect">
             <a:avLst>
@@ -4347,6 +4453,11 @@
             <a:noAutofit/>
           </a:bodyPr>
           <a:p>
+            <a:pPr>
+              <a:lnSpc>
+                <a:spcPct val="100000"/>
+              </a:lnSpc>
+            </a:pPr>
             <a:endParaRPr lang="en-US" sz="1800" b="0" u="none" strike="noStrike">
               <a:solidFill>
                 <a:srgbClr val="ffffff"/>
@@ -4367,7 +4478,7 @@
         <p:spPr>
           <a:xfrm>
             <a:off x="4709160" y="5577840"/>
-            <a:ext cx="1462680" cy="776880"/>
+            <a:ext cx="1462320" cy="776520"/>
           </a:xfrm>
           <a:prstGeom prst="rect">
             <a:avLst/>
@@ -4430,7 +4541,7 @@
         <p:spPr>
           <a:xfrm>
             <a:off x="6035040" y="5577840"/>
-            <a:ext cx="5421960" cy="776880"/>
+            <a:ext cx="5421600" cy="776520"/>
           </a:xfrm>
           <a:prstGeom prst="rect">
             <a:avLst/>
@@ -4462,7 +4573,7 @@
             <a:r>
               <a:rPr lang="en-US" sz="1200" b="0" u="sng" strike="noStrike">
                 <a:solidFill>
-                  <a:srgbClr val="00e676"/>
+                  <a:srgbClr val="0563c1"/>
                 </a:solidFill>
                 <a:effectLst/>
                 <a:uFillTx/>
@@ -4492,7 +4603,7 @@
         <p:spPr>
           <a:xfrm>
             <a:off x="10881360" y="6510600"/>
-            <a:ext cx="1096920" cy="273960"/>
+            <a:ext cx="1096560" cy="273600"/>
           </a:xfrm>
           <a:prstGeom prst="rect">
             <a:avLst/>
@@ -4553,7 +4664,7 @@
         <p:spPr>
           <a:xfrm>
             <a:off x="457200" y="6510600"/>
-            <a:ext cx="3657240" cy="273960"/>
+            <a:ext cx="3656880" cy="273600"/>
           </a:xfrm>
           <a:prstGeom prst="rect">
             <a:avLst/>
@@ -4608,13 +4719,13 @@
       <p:sp>
         <p:nvSpPr>
           <p:cNvPr id="56" name=""/>
-          <p:cNvSpPr txBox="1"/>
+          <p:cNvSpPr/>
           <p:nvPr/>
         </p:nvSpPr>
         <p:spPr>
           <a:xfrm>
             <a:off x="594360" y="2207160"/>
-            <a:ext cx="3839040" cy="307080"/>
+            <a:ext cx="3838680" cy="306720"/>
           </a:xfrm>
           <a:prstGeom prst="rect">
             <a:avLst/>
@@ -4624,11 +4735,22 @@
             <a:noFill/>
           </a:ln>
         </p:spPr>
+        <p:style>
+          <a:lnRef idx="0"/>
+          <a:fillRef idx="0"/>
+          <a:effectRef idx="0"/>
+          <a:fontRef idx="minor"/>
+        </p:style>
         <p:txBody>
           <a:bodyPr lIns="90000" rIns="90000" tIns="45000" bIns="45000" anchor="t">
             <a:spAutoFit/>
           </a:bodyPr>
           <a:p>
+            <a:pPr>
+              <a:lnSpc>
+                <a:spcPct val="100000"/>
+              </a:lnSpc>
+            </a:pPr>
             <a:r>
               <a:rPr lang="en-US" sz="1050" b="1" u="none" strike="noStrike">
                 <a:solidFill>
@@ -4698,7 +4820,7 @@
         <p:spPr>
           <a:xfrm>
             <a:off x="0" y="0"/>
-            <a:ext cx="3931560" cy="6857640"/>
+            <a:ext cx="3931200" cy="6857280"/>
           </a:xfrm>
           <a:prstGeom prst="rect">
             <a:avLst/>
@@ -4721,6 +4843,11 @@
             <a:noAutofit/>
           </a:bodyPr>
           <a:p>
+            <a:pPr>
+              <a:lnSpc>
+                <a:spcPct val="100000"/>
+              </a:lnSpc>
+            </a:pPr>
             <a:endParaRPr lang="en-US" sz="1800" b="0" u="none" strike="noStrike">
               <a:solidFill>
                 <a:srgbClr val="ffffff"/>
@@ -4741,7 +4868,7 @@
         <p:spPr>
           <a:xfrm>
             <a:off x="457200" y="502920"/>
-            <a:ext cx="2742840" cy="1005480"/>
+            <a:ext cx="2742480" cy="1005120"/>
           </a:xfrm>
           <a:prstGeom prst="rect">
             <a:avLst/>
@@ -4802,7 +4929,7 @@
         <p:spPr>
           <a:xfrm>
             <a:off x="457200" y="1600200"/>
-            <a:ext cx="3017160" cy="914040"/>
+            <a:ext cx="3016800" cy="913680"/>
           </a:xfrm>
           <a:prstGeom prst="roundRect">
             <a:avLst>
@@ -4830,6 +4957,11 @@
             <a:noAutofit/>
           </a:bodyPr>
           <a:p>
+            <a:pPr>
+              <a:lnSpc>
+                <a:spcPct val="100000"/>
+              </a:lnSpc>
+            </a:pPr>
             <a:endParaRPr lang="en-US" sz="1800" b="0" u="none" strike="noStrike">
               <a:solidFill>
                 <a:srgbClr val="ffffff"/>
@@ -4850,7 +4982,7 @@
         <p:spPr>
           <a:xfrm>
             <a:off x="640080" y="1737360"/>
-            <a:ext cx="118440" cy="118440"/>
+            <a:ext cx="118080" cy="118080"/>
           </a:xfrm>
           <a:prstGeom prst="ellipse">
             <a:avLst/>
@@ -4873,6 +5005,11 @@
             <a:noAutofit/>
           </a:bodyPr>
           <a:p>
+            <a:pPr>
+              <a:lnSpc>
+                <a:spcPct val="100000"/>
+              </a:lnSpc>
+            </a:pPr>
             <a:endParaRPr lang="en-US" sz="1800" b="0" u="none" strike="noStrike">
               <a:solidFill>
                 <a:srgbClr val="ffffff"/>
@@ -4893,7 +5030,7 @@
         <p:spPr>
           <a:xfrm>
             <a:off x="841320" y="1737360"/>
-            <a:ext cx="118440" cy="118440"/>
+            <a:ext cx="118080" cy="118080"/>
           </a:xfrm>
           <a:prstGeom prst="ellipse">
             <a:avLst/>
@@ -4916,6 +5053,11 @@
             <a:noAutofit/>
           </a:bodyPr>
           <a:p>
+            <a:pPr>
+              <a:lnSpc>
+                <a:spcPct val="100000"/>
+              </a:lnSpc>
+            </a:pPr>
             <a:endParaRPr lang="en-US" sz="1800" b="0" u="none" strike="noStrike">
               <a:solidFill>
                 <a:srgbClr val="000000"/>
@@ -4936,7 +5078,7 @@
         <p:spPr>
           <a:xfrm>
             <a:off x="1042560" y="1737360"/>
-            <a:ext cx="118440" cy="118440"/>
+            <a:ext cx="118080" cy="118080"/>
           </a:xfrm>
           <a:prstGeom prst="ellipse">
             <a:avLst/>
@@ -4959,6 +5101,11 @@
             <a:noAutofit/>
           </a:bodyPr>
           <a:p>
+            <a:pPr>
+              <a:lnSpc>
+                <a:spcPct val="100000"/>
+              </a:lnSpc>
+            </a:pPr>
             <a:endParaRPr lang="en-US" sz="1800" b="0" u="none" strike="noStrike">
               <a:solidFill>
                 <a:srgbClr val="000000"/>
@@ -4979,7 +5126,7 @@
         <p:spPr>
           <a:xfrm>
             <a:off x="594360" y="1965960"/>
-            <a:ext cx="2742840" cy="456840"/>
+            <a:ext cx="2742480" cy="456480"/>
           </a:xfrm>
           <a:prstGeom prst="rect">
             <a:avLst/>
@@ -5040,7 +5187,7 @@
         <p:spPr>
           <a:xfrm>
             <a:off x="457200" y="2743200"/>
-            <a:ext cx="3017160" cy="2377080"/>
+            <a:ext cx="3016800" cy="2376720"/>
           </a:xfrm>
           <a:prstGeom prst="rect">
             <a:avLst/>
@@ -5101,7 +5248,7 @@
         <p:spPr>
           <a:xfrm>
             <a:off x="4480560" y="548640"/>
-            <a:ext cx="7159320" cy="456840"/>
+            <a:ext cx="7158960" cy="456480"/>
           </a:xfrm>
           <a:prstGeom prst="rect">
             <a:avLst/>
@@ -5162,7 +5309,7 @@
         <p:spPr>
           <a:xfrm>
             <a:off x="4480560" y="1188720"/>
-            <a:ext cx="7159320" cy="4114440"/>
+            <a:ext cx="7158960" cy="4114080"/>
           </a:xfrm>
           <a:prstGeom prst="rect">
             <a:avLst/>
@@ -5333,7 +5480,7 @@
         <p:spPr>
           <a:xfrm>
             <a:off x="4480560" y="5577840"/>
-            <a:ext cx="7159320" cy="776880"/>
+            <a:ext cx="7158960" cy="776520"/>
           </a:xfrm>
           <a:prstGeom prst="roundRect">
             <a:avLst>
@@ -5361,6 +5508,11 @@
             <a:noAutofit/>
           </a:bodyPr>
           <a:p>
+            <a:pPr>
+              <a:lnSpc>
+                <a:spcPct val="100000"/>
+              </a:lnSpc>
+            </a:pPr>
             <a:endParaRPr lang="en-US" sz="1800" b="0" u="none" strike="noStrike">
               <a:solidFill>
                 <a:srgbClr val="ffffff"/>
@@ -5381,7 +5533,7 @@
         <p:spPr>
           <a:xfrm>
             <a:off x="4709160" y="5577840"/>
-            <a:ext cx="1462680" cy="776880"/>
+            <a:ext cx="1462320" cy="776520"/>
           </a:xfrm>
           <a:prstGeom prst="rect">
             <a:avLst/>
@@ -5444,7 +5596,7 @@
         <p:spPr>
           <a:xfrm>
             <a:off x="6035040" y="5577840"/>
-            <a:ext cx="5421960" cy="776880"/>
+            <a:ext cx="5421600" cy="776520"/>
           </a:xfrm>
           <a:prstGeom prst="rect">
             <a:avLst/>
@@ -5476,7 +5628,7 @@
             <a:r>
               <a:rPr lang="en-US" sz="1200" b="0" u="sng" strike="noStrike">
                 <a:solidFill>
-                  <a:srgbClr val="00e676"/>
+                  <a:srgbClr val="0563c1"/>
                 </a:solidFill>
                 <a:effectLst/>
                 <a:uFillTx/>
@@ -5506,7 +5658,7 @@
         <p:spPr>
           <a:xfrm>
             <a:off x="10881360" y="6510600"/>
-            <a:ext cx="1096920" cy="273960"/>
+            <a:ext cx="1096560" cy="273600"/>
           </a:xfrm>
           <a:prstGeom prst="rect">
             <a:avLst/>
@@ -5567,7 +5719,7 @@
         <p:spPr>
           <a:xfrm>
             <a:off x="457200" y="6510600"/>
-            <a:ext cx="3657240" cy="273960"/>
+            <a:ext cx="3656880" cy="273600"/>
           </a:xfrm>
           <a:prstGeom prst="rect">
             <a:avLst/>
@@ -5665,7 +5817,7 @@
         <p:spPr>
           <a:xfrm>
             <a:off x="0" y="0"/>
-            <a:ext cx="3931560" cy="6857640"/>
+            <a:ext cx="3931200" cy="6857280"/>
           </a:xfrm>
           <a:prstGeom prst="rect">
             <a:avLst/>
@@ -5688,6 +5840,11 @@
             <a:noAutofit/>
           </a:bodyPr>
           <a:p>
+            <a:pPr>
+              <a:lnSpc>
+                <a:spcPct val="100000"/>
+              </a:lnSpc>
+            </a:pPr>
             <a:endParaRPr lang="en-US" sz="1800" b="0" u="none" strike="noStrike">
               <a:solidFill>
                 <a:srgbClr val="ffffff"/>
@@ -5708,7 +5865,7 @@
         <p:spPr>
           <a:xfrm>
             <a:off x="457200" y="502920"/>
-            <a:ext cx="2742840" cy="1005480"/>
+            <a:ext cx="2742480" cy="1005120"/>
           </a:xfrm>
           <a:prstGeom prst="rect">
             <a:avLst/>
@@ -5769,7 +5926,7 @@
         <p:spPr>
           <a:xfrm>
             <a:off x="457200" y="1600200"/>
-            <a:ext cx="3017160" cy="914040"/>
+            <a:ext cx="3016800" cy="913680"/>
           </a:xfrm>
           <a:prstGeom prst="roundRect">
             <a:avLst>
@@ -5797,6 +5954,11 @@
             <a:noAutofit/>
           </a:bodyPr>
           <a:p>
+            <a:pPr>
+              <a:lnSpc>
+                <a:spcPct val="100000"/>
+              </a:lnSpc>
+            </a:pPr>
             <a:endParaRPr lang="en-US" sz="1800" b="0" u="none" strike="noStrike">
               <a:solidFill>
                 <a:srgbClr val="ffffff"/>
@@ -5817,7 +5979,7 @@
         <p:spPr>
           <a:xfrm>
             <a:off x="640080" y="1737360"/>
-            <a:ext cx="118440" cy="118440"/>
+            <a:ext cx="118080" cy="118080"/>
           </a:xfrm>
           <a:prstGeom prst="ellipse">
             <a:avLst/>
@@ -5840,6 +6002,11 @@
             <a:noAutofit/>
           </a:bodyPr>
           <a:p>
+            <a:pPr>
+              <a:lnSpc>
+                <a:spcPct val="100000"/>
+              </a:lnSpc>
+            </a:pPr>
             <a:endParaRPr lang="en-US" sz="1800" b="0" u="none" strike="noStrike">
               <a:solidFill>
                 <a:srgbClr val="ffffff"/>
@@ -5860,7 +6027,7 @@
         <p:spPr>
           <a:xfrm>
             <a:off x="841320" y="1737360"/>
-            <a:ext cx="118440" cy="118440"/>
+            <a:ext cx="118080" cy="118080"/>
           </a:xfrm>
           <a:prstGeom prst="ellipse">
             <a:avLst/>
@@ -5883,6 +6050,11 @@
             <a:noAutofit/>
           </a:bodyPr>
           <a:p>
+            <a:pPr>
+              <a:lnSpc>
+                <a:spcPct val="100000"/>
+              </a:lnSpc>
+            </a:pPr>
             <a:endParaRPr lang="en-US" sz="1800" b="0" u="none" strike="noStrike">
               <a:solidFill>
                 <a:srgbClr val="000000"/>
@@ -5903,7 +6075,7 @@
         <p:spPr>
           <a:xfrm>
             <a:off x="1042560" y="1737360"/>
-            <a:ext cx="118440" cy="118440"/>
+            <a:ext cx="118080" cy="118080"/>
           </a:xfrm>
           <a:prstGeom prst="ellipse">
             <a:avLst/>
@@ -5926,6 +6098,11 @@
             <a:noAutofit/>
           </a:bodyPr>
           <a:p>
+            <a:pPr>
+              <a:lnSpc>
+                <a:spcPct val="100000"/>
+              </a:lnSpc>
+            </a:pPr>
             <a:endParaRPr lang="en-US" sz="1800" b="0" u="none" strike="noStrike">
               <a:solidFill>
                 <a:srgbClr val="000000"/>
@@ -5946,7 +6123,7 @@
         <p:spPr>
           <a:xfrm>
             <a:off x="594360" y="1965960"/>
-            <a:ext cx="2742840" cy="456840"/>
+            <a:ext cx="2742480" cy="456480"/>
           </a:xfrm>
           <a:prstGeom prst="rect">
             <a:avLst/>
@@ -6007,7 +6184,7 @@
         <p:spPr>
           <a:xfrm>
             <a:off x="457200" y="2743200"/>
-            <a:ext cx="3017160" cy="2377080"/>
+            <a:ext cx="3016800" cy="2376720"/>
           </a:xfrm>
           <a:prstGeom prst="rect">
             <a:avLst/>
@@ -6068,7 +6245,7 @@
         <p:spPr>
           <a:xfrm>
             <a:off x="4480560" y="548640"/>
-            <a:ext cx="7159320" cy="456840"/>
+            <a:ext cx="7158960" cy="456480"/>
           </a:xfrm>
           <a:prstGeom prst="rect">
             <a:avLst/>
@@ -6129,7 +6306,7 @@
         <p:spPr>
           <a:xfrm>
             <a:off x="4480560" y="1188720"/>
-            <a:ext cx="7159320" cy="4114440"/>
+            <a:ext cx="7158960" cy="4114080"/>
           </a:xfrm>
           <a:prstGeom prst="rect">
             <a:avLst/>
@@ -6335,7 +6512,7 @@
         <p:spPr>
           <a:xfrm>
             <a:off x="4480560" y="5577840"/>
-            <a:ext cx="7159320" cy="776880"/>
+            <a:ext cx="7158960" cy="776520"/>
           </a:xfrm>
           <a:prstGeom prst="roundRect">
             <a:avLst>
@@ -6363,6 +6540,11 @@
             <a:noAutofit/>
           </a:bodyPr>
           <a:p>
+            <a:pPr>
+              <a:lnSpc>
+                <a:spcPct val="100000"/>
+              </a:lnSpc>
+            </a:pPr>
             <a:endParaRPr lang="en-US" sz="1800" b="0" u="none" strike="noStrike">
               <a:solidFill>
                 <a:srgbClr val="ffffff"/>
@@ -6383,7 +6565,7 @@
         <p:spPr>
           <a:xfrm>
             <a:off x="4709160" y="5577840"/>
-            <a:ext cx="1462680" cy="776880"/>
+            <a:ext cx="1462320" cy="776520"/>
           </a:xfrm>
           <a:prstGeom prst="rect">
             <a:avLst/>
@@ -6446,7 +6628,7 @@
         <p:spPr>
           <a:xfrm>
             <a:off x="6035040" y="5577840"/>
-            <a:ext cx="5421960" cy="776880"/>
+            <a:ext cx="5421600" cy="776520"/>
           </a:xfrm>
           <a:prstGeom prst="rect">
             <a:avLst/>
@@ -6478,7 +6660,7 @@
             <a:r>
               <a:rPr lang="en-US" sz="1200" b="0" u="sng" strike="noStrike">
                 <a:solidFill>
-                  <a:srgbClr val="00e676"/>
+                  <a:srgbClr val="0563c1"/>
                 </a:solidFill>
                 <a:effectLst/>
                 <a:uFillTx/>
@@ -6508,7 +6690,7 @@
         <p:spPr>
           <a:xfrm>
             <a:off x="10881360" y="6510600"/>
-            <a:ext cx="1096920" cy="273960"/>
+            <a:ext cx="1096560" cy="273600"/>
           </a:xfrm>
           <a:prstGeom prst="rect">
             <a:avLst/>
@@ -6569,7 +6751,7 @@
         <p:spPr>
           <a:xfrm>
             <a:off x="457200" y="6510600"/>
-            <a:ext cx="3657240" cy="273960"/>
+            <a:ext cx="3656880" cy="273600"/>
           </a:xfrm>
           <a:prstGeom prst="rect">
             <a:avLst/>
@@ -6667,7 +6849,7 @@
         <p:spPr>
           <a:xfrm>
             <a:off x="0" y="0"/>
-            <a:ext cx="3931560" cy="6857640"/>
+            <a:ext cx="3931200" cy="6857280"/>
           </a:xfrm>
           <a:prstGeom prst="rect">
             <a:avLst/>
@@ -6690,6 +6872,11 @@
             <a:noAutofit/>
           </a:bodyPr>
           <a:p>
+            <a:pPr>
+              <a:lnSpc>
+                <a:spcPct val="100000"/>
+              </a:lnSpc>
+            </a:pPr>
             <a:endParaRPr lang="en-US" sz="1800" b="0" u="none" strike="noStrike">
               <a:solidFill>
                 <a:srgbClr val="ffffff"/>
@@ -6710,7 +6897,7 @@
         <p:spPr>
           <a:xfrm>
             <a:off x="457200" y="502920"/>
-            <a:ext cx="2742840" cy="1005480"/>
+            <a:ext cx="2742480" cy="1005120"/>
           </a:xfrm>
           <a:prstGeom prst="rect">
             <a:avLst/>
@@ -6771,7 +6958,7 @@
         <p:spPr>
           <a:xfrm>
             <a:off x="457200" y="1600200"/>
-            <a:ext cx="3017160" cy="914040"/>
+            <a:ext cx="3016800" cy="913680"/>
           </a:xfrm>
           <a:prstGeom prst="roundRect">
             <a:avLst>
@@ -6799,6 +6986,11 @@
             <a:noAutofit/>
           </a:bodyPr>
           <a:p>
+            <a:pPr>
+              <a:lnSpc>
+                <a:spcPct val="100000"/>
+              </a:lnSpc>
+            </a:pPr>
             <a:endParaRPr lang="en-US" sz="1800" b="0" u="none" strike="noStrike">
               <a:solidFill>
                 <a:srgbClr val="ffffff"/>
@@ -6819,7 +7011,7 @@
         <p:spPr>
           <a:xfrm>
             <a:off x="640080" y="1737360"/>
-            <a:ext cx="118440" cy="118440"/>
+            <a:ext cx="118080" cy="118080"/>
           </a:xfrm>
           <a:prstGeom prst="ellipse">
             <a:avLst/>
@@ -6842,6 +7034,11 @@
             <a:noAutofit/>
           </a:bodyPr>
           <a:p>
+            <a:pPr>
+              <a:lnSpc>
+                <a:spcPct val="100000"/>
+              </a:lnSpc>
+            </a:pPr>
             <a:endParaRPr lang="en-US" sz="1800" b="0" u="none" strike="noStrike">
               <a:solidFill>
                 <a:srgbClr val="ffffff"/>
@@ -6862,7 +7059,7 @@
         <p:spPr>
           <a:xfrm>
             <a:off x="841320" y="1737360"/>
-            <a:ext cx="118440" cy="118440"/>
+            <a:ext cx="118080" cy="118080"/>
           </a:xfrm>
           <a:prstGeom prst="ellipse">
             <a:avLst/>
@@ -6885,6 +7082,11 @@
             <a:noAutofit/>
           </a:bodyPr>
           <a:p>
+            <a:pPr>
+              <a:lnSpc>
+                <a:spcPct val="100000"/>
+              </a:lnSpc>
+            </a:pPr>
             <a:endParaRPr lang="en-US" sz="1800" b="0" u="none" strike="noStrike">
               <a:solidFill>
                 <a:srgbClr val="000000"/>
@@ -6905,7 +7107,7 @@
         <p:spPr>
           <a:xfrm>
             <a:off x="1042560" y="1737360"/>
-            <a:ext cx="118440" cy="118440"/>
+            <a:ext cx="118080" cy="118080"/>
           </a:xfrm>
           <a:prstGeom prst="ellipse">
             <a:avLst/>
@@ -6928,6 +7130,11 @@
             <a:noAutofit/>
           </a:bodyPr>
           <a:p>
+            <a:pPr>
+              <a:lnSpc>
+                <a:spcPct val="100000"/>
+              </a:lnSpc>
+            </a:pPr>
             <a:endParaRPr lang="en-US" sz="1800" b="0" u="none" strike="noStrike">
               <a:solidFill>
                 <a:srgbClr val="000000"/>
@@ -6948,7 +7155,7 @@
         <p:spPr>
           <a:xfrm>
             <a:off x="594360" y="1965960"/>
-            <a:ext cx="2742840" cy="456840"/>
+            <a:ext cx="2742480" cy="456480"/>
           </a:xfrm>
           <a:prstGeom prst="rect">
             <a:avLst/>
@@ -7009,7 +7216,7 @@
         <p:spPr>
           <a:xfrm>
             <a:off x="457200" y="2743200"/>
-            <a:ext cx="3017160" cy="2377080"/>
+            <a:ext cx="3016800" cy="2376720"/>
           </a:xfrm>
           <a:prstGeom prst="rect">
             <a:avLst/>
@@ -7070,7 +7277,7 @@
         <p:spPr>
           <a:xfrm>
             <a:off x="4480560" y="548640"/>
-            <a:ext cx="7159320" cy="456840"/>
+            <a:ext cx="7158960" cy="456480"/>
           </a:xfrm>
           <a:prstGeom prst="rect">
             <a:avLst/>
@@ -7131,7 +7338,7 @@
         <p:spPr>
           <a:xfrm>
             <a:off x="4480560" y="1188720"/>
-            <a:ext cx="7159320" cy="4114440"/>
+            <a:ext cx="7158960" cy="4114080"/>
           </a:xfrm>
           <a:prstGeom prst="rect">
             <a:avLst/>
@@ -7337,7 +7544,7 @@
         <p:spPr>
           <a:xfrm>
             <a:off x="4480560" y="5577840"/>
-            <a:ext cx="7159320" cy="776880"/>
+            <a:ext cx="7158960" cy="776520"/>
           </a:xfrm>
           <a:prstGeom prst="roundRect">
             <a:avLst>
@@ -7365,6 +7572,11 @@
             <a:noAutofit/>
           </a:bodyPr>
           <a:p>
+            <a:pPr>
+              <a:lnSpc>
+                <a:spcPct val="100000"/>
+              </a:lnSpc>
+            </a:pPr>
             <a:endParaRPr lang="en-US" sz="1800" b="0" u="none" strike="noStrike">
               <a:solidFill>
                 <a:srgbClr val="ffffff"/>
@@ -7385,7 +7597,7 @@
         <p:spPr>
           <a:xfrm>
             <a:off x="4709160" y="5577840"/>
-            <a:ext cx="1462680" cy="776880"/>
+            <a:ext cx="1462320" cy="776520"/>
           </a:xfrm>
           <a:prstGeom prst="rect">
             <a:avLst/>
@@ -7448,7 +7660,7 @@
         <p:spPr>
           <a:xfrm>
             <a:off x="6035040" y="5577840"/>
-            <a:ext cx="5421960" cy="776880"/>
+            <a:ext cx="5421600" cy="776520"/>
           </a:xfrm>
           <a:prstGeom prst="rect">
             <a:avLst/>
@@ -7480,7 +7692,7 @@
             <a:r>
               <a:rPr lang="en-US" sz="1200" b="0" u="sng" strike="noStrike">
                 <a:solidFill>
-                  <a:srgbClr val="00e676"/>
+                  <a:srgbClr val="0563c1"/>
                 </a:solidFill>
                 <a:effectLst/>
                 <a:uFillTx/>
@@ -7510,7 +7722,7 @@
         <p:spPr>
           <a:xfrm>
             <a:off x="10881360" y="6510600"/>
-            <a:ext cx="1096920" cy="273960"/>
+            <a:ext cx="1096560" cy="273600"/>
           </a:xfrm>
           <a:prstGeom prst="rect">
             <a:avLst/>
@@ -7571,7 +7783,7 @@
         <p:spPr>
           <a:xfrm>
             <a:off x="457200" y="6510600"/>
-            <a:ext cx="3657240" cy="273960"/>
+            <a:ext cx="3656880" cy="273600"/>
           </a:xfrm>
           <a:prstGeom prst="rect">
             <a:avLst/>
